--- a/presentations/Michel Pierre Reflustop Dose De 10ml Boite 20 Sachets_presentation.pptx
+++ b/presentations/Michel Pierre Reflustop Dose De 10ml Boite 20 Sachets_presentation.pptx
@@ -3191,7 +3191,7 @@
           <a:lstStyle/>
           <a:p>
             <a:r>
-              <a:t>Ce produit est destiné aux personnes qui cherchent à soulager les désagréments gastriques et à protéger leur muqueuse gastrique</a:t>
+              <a:t>Ce produit est destiné aux personnes qui cherchent à soutenir leur santé digestive et à maintenir une muqueuse gastrique en bonne santé.</a:t>
             </a:r>
           </a:p>
         </p:txBody>
@@ -3251,7 +3251,7 @@
           <a:lstStyle/>
           <a:p>
             <a:r>
-              <a:t>Peut aider à apaiser les désagréments gastriques et à protéger la muqueuse gastrique</a:t>
+              <a:t>Peut aider à soutenir la santé digestive et contribue à maintenir la muqueuse gastrique en bonne santé.</a:t>
             </a:r>
           </a:p>
         </p:txBody>
@@ -3311,7 +3311,7 @@
           <a:lstStyle/>
           <a:p>
             <a:r>
-              <a:t>Basé sur une formule spécifique, ce complément alimentaire contribue à maintenir la santé digestive</a:t>
+              <a:t>Basé sur une formule spécifique, ce complément alimentaire peut aider à soutenir la santé digestive.</a:t>
             </a:r>
           </a:p>
         </p:txBody>
@@ -3371,7 +3371,7 @@
           <a:lstStyle/>
           <a:p>
             <a:r>
-              <a:t>1-2 sachets 3 fois par jour après les repas</a:t>
+              <a:t>1-2 sachets 3 fois par jour après les repas.</a:t>
             </a:r>
           </a:p>
         </p:txBody>
@@ -3491,7 +3491,7 @@
           <a:lstStyle/>
           <a:p>
             <a:r>
-              <a:t>En conclusion, le Michel Pierre Reflustop est un complément alimentaire qui peut aider à soulager les désagréments gastriques et à protéger la muqueuse gastrique. N'oubliez pas de consulter votre médecin avant utilisation si vous avez des questions ou des préoccupations.</a:t>
+              <a:t>En conclusion, le Michel Pierre Reflustop est un complément alimentaire qui peut aider à soutenir la santé digestive. N'oubliez pas de consulter votre médecin avant utilisation et de suivre les instructions d'usage pour un maximum de sécurité et d'efficacité.</a:t>
             </a:r>
           </a:p>
         </p:txBody>
